--- a/LabBook_010.pptx
+++ b/LabBook_010.pptx
@@ -267,7 +267,7 @@
           <a:p>
             <a:fld id="{8438F8DC-35B0-48E6-A86E-42F1F08DD00F}" type="datetimeFigureOut">
               <a:rPr lang="es-ES" smtClean="0"/>
-              <a:t>09/02/2026</a:t>
+              <a:t>02/03/2026</a:t>
             </a:fld>
             <a:endParaRPr lang="es-ES"/>
           </a:p>
@@ -444,7 +444,7 @@
           <a:p>
             <a:fld id="{FACBDC12-F39B-4B97-8F4D-6734F9D366FF}" type="datetimeFigureOut">
               <a:rPr lang="es-ES" smtClean="0"/>
-              <a:t>09/02/2026</a:t>
+              <a:t>02/03/2026</a:t>
             </a:fld>
             <a:endParaRPr lang="es-ES"/>
           </a:p>
@@ -5756,7 +5756,7 @@
         </p:nvSpPr>
         <p:spPr>
           <a:xfrm>
-            <a:off x="609441" y="4860334"/>
+            <a:off x="614451" y="4554804"/>
             <a:ext cx="11199971" cy="1200329"/>
           </a:xfrm>
           <a:prstGeom prst="rect">
@@ -6058,8 +6058,8 @@
         </p:nvSpPr>
         <p:spPr>
           <a:xfrm>
-            <a:off x="609441" y="4860334"/>
-            <a:ext cx="11199971" cy="2123658"/>
+            <a:off x="592508" y="4771645"/>
+            <a:ext cx="11199971" cy="1569660"/>
           </a:xfrm>
           <a:prstGeom prst="rect">
             <a:avLst/>
@@ -7040,27 +7040,6 @@
               </a:rPr>
               <a:t> son: TE (Mode 0) y TM (Mode 1).</a:t>
             </a:r>
-          </a:p>
-          <a:p>
-            <a:pPr algn="just"/>
-            <a:endParaRPr lang="en-US" sz="1200" dirty="0">
-              <a:latin typeface="Arial" panose="020B0604020202020204" pitchFamily="34" charset="0"/>
-              <a:cs typeface="Arial" panose="020B0604020202020204" pitchFamily="34" charset="0"/>
-            </a:endParaRPr>
-          </a:p>
-          <a:p>
-            <a:pPr algn="just"/>
-            <a:endParaRPr lang="en-US" sz="1200" dirty="0">
-              <a:latin typeface="Arial" panose="020B0604020202020204" pitchFamily="34" charset="0"/>
-              <a:cs typeface="Arial" panose="020B0604020202020204" pitchFamily="34" charset="0"/>
-            </a:endParaRPr>
-          </a:p>
-          <a:p>
-            <a:pPr algn="just"/>
-            <a:endParaRPr lang="en-US" sz="1200" dirty="0">
-              <a:latin typeface="Arial" panose="020B0604020202020204" pitchFamily="34" charset="0"/>
-              <a:cs typeface="Arial" panose="020B0604020202020204" pitchFamily="34" charset="0"/>
-            </a:endParaRPr>
           </a:p>
         </p:txBody>
       </p:sp>
